--- a/Meowrent Prezentace.pptx
+++ b/Meowrent Prezentace.pptx
@@ -359,7 +359,7 @@
           <a:p>
             <a:fld id="{8C1393AC-1BF5-43F8-A041-84A5AFB40C96}" type="datetimeFigureOut">
               <a:rPr lang="cs-CZ" smtClean="0"/>
-              <a:t>19.01.2026</a:t>
+              <a:t>20.01.2026</a:t>
             </a:fld>
             <a:endParaRPr lang="cs-CZ"/>
           </a:p>
@@ -567,7 +567,7 @@
           <a:p>
             <a:fld id="{8C1393AC-1BF5-43F8-A041-84A5AFB40C96}" type="datetimeFigureOut">
               <a:rPr lang="cs-CZ" smtClean="0"/>
-              <a:t>19.01.2026</a:t>
+              <a:t>20.01.2026</a:t>
             </a:fld>
             <a:endParaRPr lang="cs-CZ"/>
           </a:p>
@@ -839,7 +839,7 @@
           <a:p>
             <a:fld id="{8C1393AC-1BF5-43F8-A041-84A5AFB40C96}" type="datetimeFigureOut">
               <a:rPr lang="cs-CZ" smtClean="0"/>
-              <a:t>19.01.2026</a:t>
+              <a:t>20.01.2026</a:t>
             </a:fld>
             <a:endParaRPr lang="cs-CZ"/>
           </a:p>
@@ -1009,7 +1009,7 @@
           <a:p>
             <a:fld id="{8C1393AC-1BF5-43F8-A041-84A5AFB40C96}" type="datetimeFigureOut">
               <a:rPr lang="cs-CZ" smtClean="0"/>
-              <a:t>19.01.2026</a:t>
+              <a:t>20.01.2026</a:t>
             </a:fld>
             <a:endParaRPr lang="cs-CZ"/>
           </a:p>
@@ -1360,7 +1360,7 @@
           <a:p>
             <a:fld id="{8C1393AC-1BF5-43F8-A041-84A5AFB40C96}" type="datetimeFigureOut">
               <a:rPr lang="cs-CZ" smtClean="0"/>
-              <a:t>19.01.2026</a:t>
+              <a:t>20.01.2026</a:t>
             </a:fld>
             <a:endParaRPr lang="cs-CZ"/>
           </a:p>
@@ -1635,7 +1635,7 @@
           <a:p>
             <a:fld id="{8C1393AC-1BF5-43F8-A041-84A5AFB40C96}" type="datetimeFigureOut">
               <a:rPr lang="cs-CZ" smtClean="0"/>
-              <a:t>19.01.2026</a:t>
+              <a:t>20.01.2026</a:t>
             </a:fld>
             <a:endParaRPr lang="cs-CZ"/>
           </a:p>
@@ -2014,7 +2014,7 @@
           <a:p>
             <a:fld id="{8C1393AC-1BF5-43F8-A041-84A5AFB40C96}" type="datetimeFigureOut">
               <a:rPr lang="cs-CZ" smtClean="0"/>
-              <a:t>19.01.2026</a:t>
+              <a:t>20.01.2026</a:t>
             </a:fld>
             <a:endParaRPr lang="cs-CZ"/>
           </a:p>
@@ -2132,7 +2132,7 @@
           <a:p>
             <a:fld id="{8C1393AC-1BF5-43F8-A041-84A5AFB40C96}" type="datetimeFigureOut">
               <a:rPr lang="cs-CZ" smtClean="0"/>
-              <a:t>19.01.2026</a:t>
+              <a:t>20.01.2026</a:t>
             </a:fld>
             <a:endParaRPr lang="cs-CZ"/>
           </a:p>
@@ -2319,7 +2319,7 @@
           <a:p>
             <a:fld id="{8C1393AC-1BF5-43F8-A041-84A5AFB40C96}" type="datetimeFigureOut">
               <a:rPr lang="cs-CZ" smtClean="0"/>
-              <a:t>19.01.2026</a:t>
+              <a:t>20.01.2026</a:t>
             </a:fld>
             <a:endParaRPr lang="cs-CZ"/>
           </a:p>
@@ -2689,7 +2689,7 @@
           <a:p>
             <a:fld id="{8C1393AC-1BF5-43F8-A041-84A5AFB40C96}" type="datetimeFigureOut">
               <a:rPr lang="cs-CZ" smtClean="0"/>
-              <a:t>19.01.2026</a:t>
+              <a:t>20.01.2026</a:t>
             </a:fld>
             <a:endParaRPr lang="cs-CZ"/>
           </a:p>
@@ -3082,7 +3082,7 @@
           <a:p>
             <a:fld id="{8C1393AC-1BF5-43F8-A041-84A5AFB40C96}" type="datetimeFigureOut">
               <a:rPr lang="cs-CZ" smtClean="0"/>
-              <a:t>19.01.2026</a:t>
+              <a:t>20.01.2026</a:t>
             </a:fld>
             <a:endParaRPr lang="cs-CZ"/>
           </a:p>
@@ -3385,7 +3385,7 @@
           <a:p>
             <a:fld id="{8C1393AC-1BF5-43F8-A041-84A5AFB40C96}" type="datetimeFigureOut">
               <a:rPr lang="cs-CZ" smtClean="0"/>
-              <a:t>19.01.2026</a:t>
+              <a:t>20.01.2026</a:t>
             </a:fld>
             <a:endParaRPr lang="cs-CZ"/>
           </a:p>
@@ -3981,13 +3981,13 @@
   <p:clrMapOvr>
     <a:masterClrMapping/>
   </p:clrMapOvr>
-  <mc:AlternateContent xmlns:mc="http://schemas.openxmlformats.org/markup-compatibility/2006">
-    <mc:Choice xmlns:p14="http://schemas.microsoft.com/office/powerpoint/2010/main" Requires="p14">
+  <mc:AlternateContent xmlns:mc="http://schemas.openxmlformats.org/markup-compatibility/2006" xmlns:p14="http://schemas.microsoft.com/office/powerpoint/2010/main">
+    <mc:Choice Requires="p14">
       <p:transition spd="med" p14:dur="700">
         <p:fade/>
       </p:transition>
     </mc:Choice>
-    <mc:Fallback>
+    <mc:Fallback xmlns="">
       <p:transition spd="med">
         <p:fade/>
       </p:transition>
@@ -4118,13 +4118,13 @@
   <p:clrMapOvr>
     <a:masterClrMapping/>
   </p:clrMapOvr>
-  <mc:AlternateContent xmlns:mc="http://schemas.openxmlformats.org/markup-compatibility/2006">
-    <mc:Choice xmlns:p14="http://schemas.microsoft.com/office/powerpoint/2010/main" Requires="p14">
+  <mc:AlternateContent xmlns:mc="http://schemas.openxmlformats.org/markup-compatibility/2006" xmlns:p14="http://schemas.microsoft.com/office/powerpoint/2010/main">
+    <mc:Choice Requires="p14">
       <p:transition spd="med" p14:dur="700">
         <p:fade/>
       </p:transition>
     </mc:Choice>
-    <mc:Fallback>
+    <mc:Fallback xmlns="">
       <p:transition spd="med">
         <p:fade/>
       </p:transition>
@@ -5003,13 +5003,13 @@
   <p:clrMapOvr>
     <a:masterClrMapping/>
   </p:clrMapOvr>
-  <mc:AlternateContent xmlns:mc="http://schemas.openxmlformats.org/markup-compatibility/2006">
-    <mc:Choice xmlns:p14="http://schemas.microsoft.com/office/powerpoint/2010/main" Requires="p14">
+  <mc:AlternateContent xmlns:mc="http://schemas.openxmlformats.org/markup-compatibility/2006" xmlns:p14="http://schemas.microsoft.com/office/powerpoint/2010/main">
+    <mc:Choice Requires="p14">
       <p:transition spd="med" p14:dur="700">
         <p:fade/>
       </p:transition>
     </mc:Choice>
-    <mc:Fallback>
+    <mc:Fallback xmlns="">
       <p:transition spd="med">
         <p:fade/>
       </p:transition>
@@ -5340,7 +5340,7 @@
         </p:blipFill>
         <p:spPr>
           <a:xfrm>
-            <a:off x="402638" y="644300"/>
+            <a:off x="458336" y="677412"/>
             <a:ext cx="2784700" cy="2784700"/>
           </a:xfrm>
           <a:prstGeom prst="rect">
@@ -6110,13 +6110,13 @@
   <p:clrMapOvr>
     <a:masterClrMapping/>
   </p:clrMapOvr>
-  <mc:AlternateContent xmlns:mc="http://schemas.openxmlformats.org/markup-compatibility/2006">
-    <mc:Choice xmlns:p14="http://schemas.microsoft.com/office/powerpoint/2010/main" Requires="p14">
+  <mc:AlternateContent xmlns:mc="http://schemas.openxmlformats.org/markup-compatibility/2006" xmlns:p14="http://schemas.microsoft.com/office/powerpoint/2010/main">
+    <mc:Choice Requires="p14">
       <p:transition spd="med" p14:dur="700">
         <p:fade/>
       </p:transition>
     </mc:Choice>
-    <mc:Fallback>
+    <mc:Fallback xmlns="">
       <p:transition spd="med">
         <p:fade/>
       </p:transition>
@@ -6622,13 +6622,13 @@
   <p:clrMapOvr>
     <a:masterClrMapping/>
   </p:clrMapOvr>
-  <mc:AlternateContent xmlns:mc="http://schemas.openxmlformats.org/markup-compatibility/2006">
-    <mc:Choice xmlns:p14="http://schemas.microsoft.com/office/powerpoint/2010/main" Requires="p14">
+  <mc:AlternateContent xmlns:mc="http://schemas.openxmlformats.org/markup-compatibility/2006" xmlns:p14="http://schemas.microsoft.com/office/powerpoint/2010/main">
+    <mc:Choice Requires="p14">
       <p:transition spd="med" p14:dur="700">
         <p:fade/>
       </p:transition>
     </mc:Choice>
-    <mc:Fallback>
+    <mc:Fallback xmlns="">
       <p:transition spd="med">
         <p:fade/>
       </p:transition>
@@ -7148,13 +7148,13 @@
   <p:clrMapOvr>
     <a:masterClrMapping/>
   </p:clrMapOvr>
-  <mc:AlternateContent xmlns:mc="http://schemas.openxmlformats.org/markup-compatibility/2006">
-    <mc:Choice xmlns:p14="http://schemas.microsoft.com/office/powerpoint/2010/main" Requires="p14">
+  <mc:AlternateContent xmlns:mc="http://schemas.openxmlformats.org/markup-compatibility/2006" xmlns:p14="http://schemas.microsoft.com/office/powerpoint/2010/main">
+    <mc:Choice Requires="p14">
       <p:transition spd="med" p14:dur="700">
         <p:fade/>
       </p:transition>
     </mc:Choice>
-    <mc:Fallback>
+    <mc:Fallback xmlns="">
       <p:transition spd="med">
         <p:fade/>
       </p:transition>
